--- a/外送平台系統操作手冊.pptx
+++ b/外送平台系統操作手冊.pptx
@@ -221,7 +221,7 @@
           <a:p>
             <a:fld id="{6669F7E2-773A-49BD-9D0E-ADB9024B1715}" type="datetimeFigureOut">
               <a:rPr lang="zh-TW" altLang="en-US" smtClean="0"/>
-              <a:t>2025/10/20</a:t>
+              <a:t>2025/10/21</a:t>
             </a:fld>
             <a:endParaRPr lang="zh-TW" altLang="en-US"/>
           </a:p>
@@ -1211,7 +1211,7 @@
           <a:p>
             <a:fld id="{5BCAD085-E8A6-8845-BD4E-CB4CCA059FC4}" type="datetimeFigureOut">
               <a:rPr lang="en-US" smtClean="0"/>
-              <a:t>10/20/2025</a:t>
+              <a:t>10/21/2025</a:t>
             </a:fld>
             <a:endParaRPr lang="en-US"/>
           </a:p>
@@ -1462,7 +1462,7 @@
           <a:p>
             <a:fld id="{5BCAD085-E8A6-8845-BD4E-CB4CCA059FC4}" type="datetimeFigureOut">
               <a:rPr lang="en-US" smtClean="0"/>
-              <a:t>10/20/2025</a:t>
+              <a:t>10/21/2025</a:t>
             </a:fld>
             <a:endParaRPr lang="en-US"/>
           </a:p>
@@ -1776,7 +1776,7 @@
           <a:p>
             <a:fld id="{5BCAD085-E8A6-8845-BD4E-CB4CCA059FC4}" type="datetimeFigureOut">
               <a:rPr lang="en-US" smtClean="0"/>
-              <a:t>10/20/2025</a:t>
+              <a:t>10/21/2025</a:t>
             </a:fld>
             <a:endParaRPr lang="en-US"/>
           </a:p>
@@ -2117,7 +2117,7 @@
           <a:p>
             <a:fld id="{5BCAD085-E8A6-8845-BD4E-CB4CCA059FC4}" type="datetimeFigureOut">
               <a:rPr lang="en-US" smtClean="0"/>
-              <a:t>10/20/2025</a:t>
+              <a:t>10/21/2025</a:t>
             </a:fld>
             <a:endParaRPr lang="en-US"/>
           </a:p>
@@ -2431,7 +2431,7 @@
           <a:p>
             <a:fld id="{5BCAD085-E8A6-8845-BD4E-CB4CCA059FC4}" type="datetimeFigureOut">
               <a:rPr lang="en-US" smtClean="0"/>
-              <a:t>10/20/2025</a:t>
+              <a:t>10/21/2025</a:t>
             </a:fld>
             <a:endParaRPr lang="en-US"/>
           </a:p>
@@ -2824,7 +2824,7 @@
           <a:p>
             <a:fld id="{5BCAD085-E8A6-8845-BD4E-CB4CCA059FC4}" type="datetimeFigureOut">
               <a:rPr lang="en-US" smtClean="0"/>
-              <a:t>10/20/2025</a:t>
+              <a:t>10/21/2025</a:t>
             </a:fld>
             <a:endParaRPr lang="en-US"/>
           </a:p>
@@ -2994,7 +2994,7 @@
           <a:p>
             <a:fld id="{5BCAD085-E8A6-8845-BD4E-CB4CCA059FC4}" type="datetimeFigureOut">
               <a:rPr lang="en-US" smtClean="0"/>
-              <a:t>10/20/2025</a:t>
+              <a:t>10/21/2025</a:t>
             </a:fld>
             <a:endParaRPr lang="en-US"/>
           </a:p>
@@ -3174,7 +3174,7 @@
           <a:p>
             <a:fld id="{5BCAD085-E8A6-8845-BD4E-CB4CCA059FC4}" type="datetimeFigureOut">
               <a:rPr lang="en-US" smtClean="0"/>
-              <a:t>10/20/2025</a:t>
+              <a:t>10/21/2025</a:t>
             </a:fld>
             <a:endParaRPr lang="en-US"/>
           </a:p>
@@ -3350,7 +3350,7 @@
           <a:p>
             <a:fld id="{5BCAD085-E8A6-8845-BD4E-CB4CCA059FC4}" type="datetimeFigureOut">
               <a:rPr lang="en-US" smtClean="0"/>
-              <a:t>10/20/2025</a:t>
+              <a:t>10/21/2025</a:t>
             </a:fld>
             <a:endParaRPr lang="en-US"/>
           </a:p>
@@ -3597,7 +3597,7 @@
           <a:p>
             <a:fld id="{5BCAD085-E8A6-8845-BD4E-CB4CCA059FC4}" type="datetimeFigureOut">
               <a:rPr lang="en-US" smtClean="0"/>
-              <a:t>10/20/2025</a:t>
+              <a:t>10/21/2025</a:t>
             </a:fld>
             <a:endParaRPr lang="en-US"/>
           </a:p>
@@ -3829,7 +3829,7 @@
           <a:p>
             <a:fld id="{5BCAD085-E8A6-8845-BD4E-CB4CCA059FC4}" type="datetimeFigureOut">
               <a:rPr lang="en-US" smtClean="0"/>
-              <a:t>10/20/2025</a:t>
+              <a:t>10/21/2025</a:t>
             </a:fld>
             <a:endParaRPr lang="en-US"/>
           </a:p>
@@ -4203,7 +4203,7 @@
           <a:p>
             <a:fld id="{5BCAD085-E8A6-8845-BD4E-CB4CCA059FC4}" type="datetimeFigureOut">
               <a:rPr lang="en-US" smtClean="0"/>
-              <a:t>10/20/2025</a:t>
+              <a:t>10/21/2025</a:t>
             </a:fld>
             <a:endParaRPr lang="en-US"/>
           </a:p>
@@ -4326,7 +4326,7 @@
           <a:p>
             <a:fld id="{5BCAD085-E8A6-8845-BD4E-CB4CCA059FC4}" type="datetimeFigureOut">
               <a:rPr lang="en-US" smtClean="0"/>
-              <a:t>10/20/2025</a:t>
+              <a:t>10/21/2025</a:t>
             </a:fld>
             <a:endParaRPr lang="en-US"/>
           </a:p>
@@ -4421,7 +4421,7 @@
           <a:p>
             <a:fld id="{5BCAD085-E8A6-8845-BD4E-CB4CCA059FC4}" type="datetimeFigureOut">
               <a:rPr lang="en-US" smtClean="0"/>
-              <a:t>10/20/2025</a:t>
+              <a:t>10/21/2025</a:t>
             </a:fld>
             <a:endParaRPr lang="en-US"/>
           </a:p>
@@ -4676,7 +4676,7 @@
           <a:p>
             <a:fld id="{5BCAD085-E8A6-8845-BD4E-CB4CCA059FC4}" type="datetimeFigureOut">
               <a:rPr lang="en-US" smtClean="0"/>
-              <a:t>10/20/2025</a:t>
+              <a:t>10/21/2025</a:t>
             </a:fld>
             <a:endParaRPr lang="en-US"/>
           </a:p>
@@ -4939,7 +4939,7 @@
           <a:p>
             <a:fld id="{5BCAD085-E8A6-8845-BD4E-CB4CCA059FC4}" type="datetimeFigureOut">
               <a:rPr lang="en-US" smtClean="0"/>
-              <a:t>10/20/2025</a:t>
+              <a:t>10/21/2025</a:t>
             </a:fld>
             <a:endParaRPr lang="en-US"/>
           </a:p>
@@ -5682,7 +5682,7 @@
           <a:p>
             <a:fld id="{5BCAD085-E8A6-8845-BD4E-CB4CCA059FC4}" type="datetimeFigureOut">
               <a:rPr lang="en-US" smtClean="0"/>
-              <a:t>10/20/2025</a:t>
+              <a:t>10/21/2025</a:t>
             </a:fld>
             <a:endParaRPr lang="en-US"/>
           </a:p>
@@ -8899,18 +8899,7 @@
                   </a:schemeClr>
                 </a:solidFill>
               </a:rPr>
-              <a:t>• </a:t>
-            </a:r>
-            <a:r>
-              <a:rPr sz="2000" b="1" dirty="0">
-                <a:solidFill>
-                  <a:schemeClr val="tx1">
-                    <a:lumMod val="95000"/>
-                    <a:lumOff val="5000"/>
-                  </a:schemeClr>
-                </a:solidFill>
-              </a:rPr>
-              <a:t>可</a:t>
+              <a:t>• 可</a:t>
             </a:r>
             <a:r>
               <a:rPr lang="zh-TW" altLang="en-US" sz="2000" b="1" dirty="0">
@@ -9879,7 +9868,7 @@
         </p:nvSpPr>
         <p:spPr>
           <a:xfrm>
-            <a:off x="457200" y="274320"/>
+            <a:off x="-24115" y="67943"/>
             <a:ext cx="2646878" cy="584775"/>
           </a:xfrm>
           <a:prstGeom prst="rect">
@@ -9948,8 +9937,8 @@
         </p:nvSpPr>
         <p:spPr>
           <a:xfrm>
-            <a:off x="167982" y="1615029"/>
-            <a:ext cx="3225314" cy="707886"/>
+            <a:off x="152627" y="661190"/>
+            <a:ext cx="2247590" cy="707886"/>
           </a:xfrm>
           <a:prstGeom prst="rect">
             <a:avLst/>
@@ -10053,7 +10042,7 @@
         </p:nvSpPr>
         <p:spPr>
           <a:xfrm>
-            <a:off x="1702825" y="2858833"/>
+            <a:off x="1702824" y="2893783"/>
             <a:ext cx="2262158" cy="646331"/>
           </a:xfrm>
           <a:prstGeom prst="rect">
@@ -10264,6 +10253,105 @@
           </a:fontRef>
         </p:style>
       </p:cxnSp>
+      <p:sp>
+        <p:nvSpPr>
+          <p:cNvPr id="12" name="文字方塊 11"/>
+          <p:cNvSpPr txBox="1"/>
+          <p:nvPr/>
+        </p:nvSpPr>
+        <p:spPr>
+          <a:xfrm>
+            <a:off x="2488423" y="1307541"/>
+            <a:ext cx="2876108" cy="369332"/>
+          </a:xfrm>
+          <a:prstGeom prst="rect">
+            <a:avLst/>
+          </a:prstGeom>
+          <a:noFill/>
+        </p:spPr>
+        <p:txBody>
+          <a:bodyPr wrap="none" rtlCol="0">
+            <a:spAutoFit/>
+          </a:bodyPr>
+          <a:lstStyle/>
+          <a:p>
+            <a:r>
+              <a:rPr lang="zh-TW" altLang="en-US" b="1" dirty="0" smtClean="0"/>
+              <a:t>修改</a:t>
+            </a:r>
+            <a:r>
+              <a:rPr lang="en-US" altLang="zh-TW" b="1" dirty="0" smtClean="0"/>
+              <a:t>Gmail</a:t>
+            </a:r>
+            <a:r>
+              <a:rPr lang="zh-TW" altLang="en-US" b="1" dirty="0"/>
+              <a:t>一</a:t>
+            </a:r>
+            <a:r>
+              <a:rPr lang="zh-TW" altLang="en-US" b="1" dirty="0" smtClean="0"/>
+              <a:t>樣會傳驗證碼</a:t>
+            </a:r>
+            <a:endParaRPr lang="zh-TW" altLang="en-US" b="1" dirty="0"/>
+          </a:p>
+        </p:txBody>
+      </p:sp>
+      <p:cxnSp>
+        <p:nvCxnSpPr>
+          <p:cNvPr id="13" name="直線單箭頭接點 12"/>
+          <p:cNvCxnSpPr/>
+          <p:nvPr/>
+        </p:nvCxnSpPr>
+        <p:spPr>
+          <a:xfrm>
+            <a:off x="4405227" y="2294189"/>
+            <a:ext cx="1314086" cy="116497"/>
+          </a:xfrm>
+          <a:prstGeom prst="straightConnector1">
+            <a:avLst/>
+          </a:prstGeom>
+          <a:ln>
+            <a:tailEnd type="triangle"/>
+          </a:ln>
+        </p:spPr>
+        <p:style>
+          <a:lnRef idx="1">
+            <a:schemeClr val="accent1"/>
+          </a:lnRef>
+          <a:fillRef idx="0">
+            <a:schemeClr val="accent1"/>
+          </a:fillRef>
+          <a:effectRef idx="0">
+            <a:schemeClr val="accent1"/>
+          </a:effectRef>
+          <a:fontRef idx="minor">
+            <a:schemeClr val="tx1"/>
+          </a:fontRef>
+        </p:style>
+      </p:cxnSp>
+      <p:pic>
+        <p:nvPicPr>
+          <p:cNvPr id="4" name="圖片 3"/>
+          <p:cNvPicPr>
+            <a:picLocks noChangeAspect="1"/>
+          </p:cNvPicPr>
+          <p:nvPr/>
+        </p:nvPicPr>
+        <p:blipFill>
+          <a:blip r:embed="rId5"/>
+          <a:stretch>
+            <a:fillRect/>
+          </a:stretch>
+        </p:blipFill>
+        <p:spPr>
+          <a:xfrm>
+            <a:off x="2152067" y="1756908"/>
+            <a:ext cx="2074794" cy="1072209"/>
+          </a:xfrm>
+          <a:prstGeom prst="rect">
+            <a:avLst/>
+          </a:prstGeom>
+        </p:spPr>
+      </p:pic>
     </p:spTree>
   </p:cSld>
   <p:clrMapOvr>

--- a/外送平台系統操作手冊.pptx
+++ b/外送平台系統操作手冊.pptx
@@ -7073,18 +7073,7 @@
                   </a:schemeClr>
                 </a:solidFill>
               </a:rPr>
-              <a:t>外送員</a:t>
-            </a:r>
-            <a:r>
-              <a:rPr lang="zh-TW" altLang="en-US" sz="2000" b="1" dirty="0" smtClean="0">
-                <a:solidFill>
-                  <a:schemeClr val="tx1">
-                    <a:lumMod val="95000"/>
-                    <a:lumOff val="5000"/>
-                  </a:schemeClr>
-                </a:solidFill>
-              </a:rPr>
-              <a:t>名稱</a:t>
+              <a:t>外送員名稱</a:t>
             </a:r>
             <a:r>
               <a:rPr lang="en-US" altLang="zh-TW" sz="2000" b="1" smtClean="0">
@@ -8472,10 +8461,10 @@
                   </a:schemeClr>
                 </a:solidFill>
               </a:rPr>
-              <a:t>商品並透過*</a:t>
-            </a:r>
-            <a:r>
-              <a:rPr lang="en-US" altLang="zh-TW" b="1" dirty="0">
+              <a:t>商品並</a:t>
+            </a:r>
+            <a:r>
+              <a:rPr lang="zh-TW" altLang="en-US" b="1" dirty="0" smtClean="0">
                 <a:solidFill>
                   <a:schemeClr val="tx1">
                     <a:lumMod val="95000"/>
@@ -8483,7 +8472,18 @@
                   </a:schemeClr>
                 </a:solidFill>
               </a:rPr>
-              <a:t>/-</a:t>
+              <a:t>透過</a:t>
+            </a:r>
+            <a:r>
+              <a:rPr lang="en-US" altLang="zh-TW" b="1" smtClean="0">
+                <a:solidFill>
+                  <a:schemeClr val="tx1">
+                    <a:lumMod val="95000"/>
+                    <a:lumOff val="5000"/>
+                  </a:schemeClr>
+                </a:solidFill>
+              </a:rPr>
+              <a:t>+/-</a:t>
             </a:r>
             <a:r>
               <a:rPr lang="zh-TW" altLang="en-US" b="1" dirty="0">
